--- a/slides/S2_FileIO.pptx
+++ b/slides/S2_FileIO.pptx
@@ -15,12 +15,15 @@
     <p:sldId id="281" r:id="rId9"/>
     <p:sldId id="285" r:id="rId10"/>
     <p:sldId id="287" r:id="rId11"/>
-    <p:sldId id="273" r:id="rId12"/>
-    <p:sldId id="283" r:id="rId13"/>
-    <p:sldId id="284" r:id="rId14"/>
-    <p:sldId id="288" r:id="rId15"/>
-    <p:sldId id="286" r:id="rId16"/>
-    <p:sldId id="302" r:id="rId17"/>
+    <p:sldId id="303" r:id="rId12"/>
+    <p:sldId id="304" r:id="rId13"/>
+    <p:sldId id="305" r:id="rId14"/>
+    <p:sldId id="273" r:id="rId15"/>
+    <p:sldId id="283" r:id="rId16"/>
+    <p:sldId id="284" r:id="rId17"/>
+    <p:sldId id="288" r:id="rId18"/>
+    <p:sldId id="286" r:id="rId19"/>
+    <p:sldId id="302" r:id="rId20"/>
   </p:sldIdLst>
   <p:sldSz cx="12192000" cy="6858000"/>
   <p:notesSz cx="6858000" cy="9144000"/>
@@ -119,6 +122,11 @@
       </a:defRPr>
     </a:lvl9pPr>
   </p:defaultTextStyle>
+  <p:extLst>
+    <p:ext uri="{EFAFB233-063F-42B5-8137-9DF3F51BA10A}">
+      <p15:sldGuideLst xmlns:p15="http://schemas.microsoft.com/office/powerpoint/2012/main"/>
+    </p:ext>
+  </p:extLst>
 </p:presentation>
 </file>
 
@@ -271,7 +279,7 @@
           <a:p>
             <a:fld id="{A99E7099-71A8-4FF1-87AD-90BEE68CF5AF}" type="datetimeFigureOut">
               <a:rPr lang="en-NL" smtClean="0"/>
-              <a:t>03/03/2026</a:t>
+              <a:t>05/03/2026</a:t>
             </a:fld>
             <a:endParaRPr lang="en-NL"/>
           </a:p>
@@ -471,7 +479,7 @@
           <a:p>
             <a:fld id="{A99E7099-71A8-4FF1-87AD-90BEE68CF5AF}" type="datetimeFigureOut">
               <a:rPr lang="en-NL" smtClean="0"/>
-              <a:t>03/03/2026</a:t>
+              <a:t>05/03/2026</a:t>
             </a:fld>
             <a:endParaRPr lang="en-NL"/>
           </a:p>
@@ -681,7 +689,7 @@
           <a:p>
             <a:fld id="{A99E7099-71A8-4FF1-87AD-90BEE68CF5AF}" type="datetimeFigureOut">
               <a:rPr lang="en-NL" smtClean="0"/>
-              <a:t>03/03/2026</a:t>
+              <a:t>05/03/2026</a:t>
             </a:fld>
             <a:endParaRPr lang="en-NL"/>
           </a:p>
@@ -881,7 +889,7 @@
           <a:p>
             <a:fld id="{A99E7099-71A8-4FF1-87AD-90BEE68CF5AF}" type="datetimeFigureOut">
               <a:rPr lang="en-NL" smtClean="0"/>
-              <a:t>03/03/2026</a:t>
+              <a:t>05/03/2026</a:t>
             </a:fld>
             <a:endParaRPr lang="en-NL"/>
           </a:p>
@@ -1157,7 +1165,7 @@
           <a:p>
             <a:fld id="{A99E7099-71A8-4FF1-87AD-90BEE68CF5AF}" type="datetimeFigureOut">
               <a:rPr lang="en-NL" smtClean="0"/>
-              <a:t>03/03/2026</a:t>
+              <a:t>05/03/2026</a:t>
             </a:fld>
             <a:endParaRPr lang="en-NL"/>
           </a:p>
@@ -1425,7 +1433,7 @@
           <a:p>
             <a:fld id="{A99E7099-71A8-4FF1-87AD-90BEE68CF5AF}" type="datetimeFigureOut">
               <a:rPr lang="en-NL" smtClean="0"/>
-              <a:t>03/03/2026</a:t>
+              <a:t>05/03/2026</a:t>
             </a:fld>
             <a:endParaRPr lang="en-NL"/>
           </a:p>
@@ -1840,7 +1848,7 @@
           <a:p>
             <a:fld id="{A99E7099-71A8-4FF1-87AD-90BEE68CF5AF}" type="datetimeFigureOut">
               <a:rPr lang="en-NL" smtClean="0"/>
-              <a:t>03/03/2026</a:t>
+              <a:t>05/03/2026</a:t>
             </a:fld>
             <a:endParaRPr lang="en-NL"/>
           </a:p>
@@ -1982,7 +1990,7 @@
           <a:p>
             <a:fld id="{A99E7099-71A8-4FF1-87AD-90BEE68CF5AF}" type="datetimeFigureOut">
               <a:rPr lang="en-NL" smtClean="0"/>
-              <a:t>03/03/2026</a:t>
+              <a:t>05/03/2026</a:t>
             </a:fld>
             <a:endParaRPr lang="en-NL"/>
           </a:p>
@@ -2095,7 +2103,7 @@
           <a:p>
             <a:fld id="{A99E7099-71A8-4FF1-87AD-90BEE68CF5AF}" type="datetimeFigureOut">
               <a:rPr lang="en-NL" smtClean="0"/>
-              <a:t>03/03/2026</a:t>
+              <a:t>05/03/2026</a:t>
             </a:fld>
             <a:endParaRPr lang="en-NL"/>
           </a:p>
@@ -2408,7 +2416,7 @@
           <a:p>
             <a:fld id="{A99E7099-71A8-4FF1-87AD-90BEE68CF5AF}" type="datetimeFigureOut">
               <a:rPr lang="en-NL" smtClean="0"/>
-              <a:t>03/03/2026</a:t>
+              <a:t>05/03/2026</a:t>
             </a:fld>
             <a:endParaRPr lang="en-NL"/>
           </a:p>
@@ -2697,7 +2705,7 @@
           <a:p>
             <a:fld id="{A99E7099-71A8-4FF1-87AD-90BEE68CF5AF}" type="datetimeFigureOut">
               <a:rPr lang="en-NL" smtClean="0"/>
-              <a:t>03/03/2026</a:t>
+              <a:t>05/03/2026</a:t>
             </a:fld>
             <a:endParaRPr lang="en-NL"/>
           </a:p>
@@ -2940,7 +2948,7 @@
           <a:p>
             <a:fld id="{A99E7099-71A8-4FF1-87AD-90BEE68CF5AF}" type="datetimeFigureOut">
               <a:rPr lang="en-NL" smtClean="0"/>
-              <a:t>03/03/2026</a:t>
+              <a:t>05/03/2026</a:t>
             </a:fld>
             <a:endParaRPr lang="en-NL"/>
           </a:p>
@@ -3381,16 +3389,12 @@
         </p:spPr>
         <p:txBody>
           <a:bodyPr>
-            <a:normAutofit fontScale="90000"/>
+            <a:normAutofit/>
           </a:bodyPr>
           <a:lstStyle/>
           <a:p>
             <a:pPr algn="l"/>
             <a:r>
-              <a:rPr lang="en-US" dirty="0"/>
-              <a:t>	</a:t>
-            </a:r>
-            <a:r>
               <a:rPr lang="en-US" sz="2200" dirty="0" err="1"/>
               <a:t>ofstream</a:t>
             </a:r>
@@ -3407,35 +3411,30 @@
               <a:t>;</a:t>
             </a:r>
             <a:br>
-              <a:rPr lang="en-US" dirty="0"/>
+              <a:rPr lang="en-US" sz="2200" dirty="0"/>
             </a:br>
-            <a:r>
-              <a:rPr lang="en-US" dirty="0"/>
-              <a:t>	</a:t>
-            </a:r>
             <a:r>
               <a:rPr lang="en-US" sz="2200" dirty="0" err="1"/>
               <a:t>myfile.open</a:t>
             </a:r>
             <a:r>
               <a:rPr lang="en-US" sz="2200" dirty="0"/>
-              <a:t>(“</a:t>
+              <a:t>(“		</a:t>
             </a:r>
             <a:r>
               <a:rPr lang="en-US" dirty="0"/>
-              <a:t>S2_FileIO.ppt</a:t>
+              <a:t>S2_FileIO.ppt		</a:t>
             </a:r>
             <a:r>
               <a:rPr lang="en-US" sz="2200" dirty="0"/>
               <a:t>”);</a:t>
             </a:r>
             <a:br>
-              <a:rPr lang="en-US" dirty="0"/>
+              <a:rPr lang="en-US" sz="2200" dirty="0"/>
             </a:br>
-            <a:r>
-              <a:rPr lang="en-US" dirty="0"/>
-              <a:t>	</a:t>
-            </a:r>
+            <a:br>
+              <a:rPr lang="en-US" sz="2200" dirty="0"/>
+            </a:br>
             <a:r>
               <a:rPr lang="en-US" sz="2200" dirty="0" err="1"/>
               <a:t>myfile.close</a:t>
@@ -4165,6 +4164,2190 @@
   <p:cSld>
     <p:spTree>
       <p:nvGrpSpPr>
+        <p:cNvPr id="1" name="">
+          <a:extLst>
+            <a:ext uri="{FF2B5EF4-FFF2-40B4-BE49-F238E27FC236}">
+              <a16:creationId xmlns:a16="http://schemas.microsoft.com/office/drawing/2014/main" id="{653F8BD9-B515-7A66-D9BD-647AE51BBD02}"/>
+            </a:ext>
+          </a:extLst>
+        </p:cNvPr>
+        <p:cNvGrpSpPr/>
+        <p:nvPr/>
+      </p:nvGrpSpPr>
+      <p:grpSpPr>
+        <a:xfrm>
+          <a:off x="0" y="0"/>
+          <a:ext cx="0" cy="0"/>
+          <a:chOff x="0" y="0"/>
+          <a:chExt cx="0" cy="0"/>
+        </a:xfrm>
+      </p:grpSpPr>
+      <p:sp>
+        <p:nvSpPr>
+          <p:cNvPr id="7" name="Title 6">
+            <a:extLst>
+              <a:ext uri="{FF2B5EF4-FFF2-40B4-BE49-F238E27FC236}">
+                <a16:creationId xmlns:a16="http://schemas.microsoft.com/office/drawing/2014/main" id="{94592A06-ABC1-8DE8-0A0D-3263155DEE07}"/>
+              </a:ext>
+            </a:extLst>
+          </p:cNvPr>
+          <p:cNvSpPr>
+            <a:spLocks noGrp="1"/>
+          </p:cNvSpPr>
+          <p:nvPr>
+            <p:ph type="title"/>
+          </p:nvPr>
+        </p:nvSpPr>
+        <p:spPr/>
+        <p:txBody>
+          <a:bodyPr/>
+          <a:lstStyle/>
+          <a:p>
+            <a:r>
+              <a:rPr lang="en-US" dirty="0"/>
+              <a:t>File I/</a:t>
+            </a:r>
+            <a:r>
+              <a:rPr lang="en-US" strike="sngStrike" dirty="0"/>
+              <a:t>O</a:t>
+            </a:r>
+            <a:endParaRPr lang="en-NL" strike="sngStrike" dirty="0"/>
+          </a:p>
+        </p:txBody>
+      </p:sp>
+      <p:sp>
+        <p:nvSpPr>
+          <p:cNvPr id="8" name="Content Placeholder 7">
+            <a:extLst>
+              <a:ext uri="{FF2B5EF4-FFF2-40B4-BE49-F238E27FC236}">
+                <a16:creationId xmlns:a16="http://schemas.microsoft.com/office/drawing/2014/main" id="{FE266499-003D-6235-C6A1-2FB2E28E8705}"/>
+              </a:ext>
+            </a:extLst>
+          </p:cNvPr>
+          <p:cNvSpPr>
+            <a:spLocks noGrp="1"/>
+          </p:cNvSpPr>
+          <p:nvPr>
+            <p:ph idx="1"/>
+          </p:nvPr>
+        </p:nvSpPr>
+        <p:spPr/>
+        <p:txBody>
+          <a:bodyPr>
+            <a:normAutofit lnSpcReduction="10000"/>
+          </a:bodyPr>
+          <a:lstStyle/>
+          <a:p>
+            <a:pPr marL="0" indent="0">
+              <a:buNone/>
+            </a:pPr>
+            <a:r>
+              <a:rPr lang="en-US" sz="2800" dirty="0" err="1">
+                <a:solidFill>
+                  <a:srgbClr val="000000"/>
+                </a:solidFill>
+                <a:highlight>
+                  <a:srgbClr val="FFFFFF"/>
+                </a:highlight>
+              </a:rPr>
+              <a:t>ifstream</a:t>
+            </a:r>
+            <a:r>
+              <a:rPr lang="en-US" sz="2800" dirty="0">
+                <a:solidFill>
+                  <a:srgbClr val="000000"/>
+                </a:solidFill>
+                <a:highlight>
+                  <a:srgbClr val="FFFFFF"/>
+                </a:highlight>
+              </a:rPr>
+              <a:t> f</a:t>
+            </a:r>
+            <a:r>
+              <a:rPr lang="en-US" sz="2800" b="1" dirty="0">
+                <a:solidFill>
+                  <a:srgbClr val="000080"/>
+                </a:solidFill>
+                <a:highlight>
+                  <a:srgbClr val="FFFFFF"/>
+                </a:highlight>
+              </a:rPr>
+              <a:t>(</a:t>
+            </a:r>
+            <a:r>
+              <a:rPr lang="en-US" sz="2800" b="0" dirty="0">
+                <a:solidFill>
+                  <a:srgbClr val="808080"/>
+                </a:solidFill>
+                <a:highlight>
+                  <a:srgbClr val="FFFFFF"/>
+                </a:highlight>
+              </a:rPr>
+              <a:t>"my_file.txt"</a:t>
+            </a:r>
+            <a:r>
+              <a:rPr lang="en-US" sz="2800" b="1" dirty="0">
+                <a:solidFill>
+                  <a:srgbClr val="000080"/>
+                </a:solidFill>
+                <a:highlight>
+                  <a:srgbClr val="FFFFFF"/>
+                </a:highlight>
+              </a:rPr>
+              <a:t>);</a:t>
+            </a:r>
+            <a:endParaRPr lang="en-US" sz="2800" b="0" dirty="0">
+              <a:solidFill>
+                <a:srgbClr val="000000"/>
+              </a:solidFill>
+              <a:highlight>
+                <a:srgbClr val="FFFFFF"/>
+              </a:highlight>
+            </a:endParaRPr>
+          </a:p>
+          <a:p>
+            <a:pPr marL="0" indent="0">
+              <a:buNone/>
+            </a:pPr>
+            <a:r>
+              <a:rPr lang="nl-NL" b="1" dirty="0">
+                <a:solidFill>
+                  <a:srgbClr val="0000FF"/>
+                </a:solidFill>
+                <a:highlight>
+                  <a:srgbClr val="FFFFFF"/>
+                </a:highlight>
+              </a:rPr>
+              <a:t>if</a:t>
+            </a:r>
+            <a:r>
+              <a:rPr lang="nl-NL" dirty="0">
+                <a:solidFill>
+                  <a:srgbClr val="000000"/>
+                </a:solidFill>
+                <a:highlight>
+                  <a:srgbClr val="FFFFFF"/>
+                </a:highlight>
+              </a:rPr>
+              <a:t> </a:t>
+            </a:r>
+            <a:r>
+              <a:rPr lang="nl-NL" b="1" dirty="0">
+                <a:solidFill>
+                  <a:srgbClr val="000080"/>
+                </a:solidFill>
+                <a:highlight>
+                  <a:srgbClr val="FFFFFF"/>
+                </a:highlight>
+              </a:rPr>
+              <a:t>(</a:t>
+            </a:r>
+            <a:r>
+              <a:rPr lang="nl-NL" dirty="0">
+                <a:solidFill>
+                  <a:srgbClr val="000000"/>
+                </a:solidFill>
+                <a:highlight>
+                  <a:srgbClr val="FFFFFF"/>
+                </a:highlight>
+              </a:rPr>
+              <a:t>f</a:t>
+            </a:r>
+            <a:r>
+              <a:rPr lang="nl-NL" b="1" dirty="0">
+                <a:solidFill>
+                  <a:srgbClr val="000080"/>
+                </a:solidFill>
+                <a:highlight>
+                  <a:srgbClr val="FFFFFF"/>
+                </a:highlight>
+              </a:rPr>
+              <a:t>.</a:t>
+            </a:r>
+            <a:r>
+              <a:rPr lang="nl-NL" dirty="0">
+                <a:solidFill>
+                  <a:srgbClr val="000000"/>
+                </a:solidFill>
+                <a:highlight>
+                  <a:srgbClr val="FFFFFF"/>
+                </a:highlight>
+              </a:rPr>
+              <a:t>is_open</a:t>
+            </a:r>
+            <a:r>
+              <a:rPr lang="nl-NL" b="1" dirty="0">
+                <a:solidFill>
+                  <a:srgbClr val="000080"/>
+                </a:solidFill>
+                <a:highlight>
+                  <a:srgbClr val="FFFFFF"/>
+                </a:highlight>
+              </a:rPr>
+              <a:t>())</a:t>
+            </a:r>
+            <a:r>
+              <a:rPr lang="nl-NL" dirty="0">
+                <a:solidFill>
+                  <a:srgbClr val="000000"/>
+                </a:solidFill>
+                <a:highlight>
+                  <a:srgbClr val="FFFFFF"/>
+                </a:highlight>
+              </a:rPr>
+              <a:t> </a:t>
+            </a:r>
+            <a:r>
+              <a:rPr lang="nl-NL" b="1" dirty="0">
+                <a:solidFill>
+                  <a:srgbClr val="000080"/>
+                </a:solidFill>
+                <a:highlight>
+                  <a:srgbClr val="FFFFFF"/>
+                </a:highlight>
+              </a:rPr>
+              <a:t>{</a:t>
+            </a:r>
+            <a:endParaRPr lang="nl-NL" dirty="0">
+              <a:solidFill>
+                <a:srgbClr val="000000"/>
+              </a:solidFill>
+              <a:highlight>
+                <a:srgbClr val="FFFFFF"/>
+              </a:highlight>
+            </a:endParaRPr>
+          </a:p>
+          <a:p>
+            <a:pPr marL="0" indent="0">
+              <a:buNone/>
+            </a:pPr>
+            <a:r>
+              <a:rPr lang="nl-NL" dirty="0">
+                <a:solidFill>
+                  <a:srgbClr val="000000"/>
+                </a:solidFill>
+                <a:highlight>
+                  <a:srgbClr val="FFFFFF"/>
+                </a:highlight>
+              </a:rPr>
+              <a:t>    string line</a:t>
+            </a:r>
+            <a:r>
+              <a:rPr lang="nl-NL" b="1" dirty="0">
+                <a:solidFill>
+                  <a:srgbClr val="000080"/>
+                </a:solidFill>
+                <a:highlight>
+                  <a:srgbClr val="FFFFFF"/>
+                </a:highlight>
+              </a:rPr>
+              <a:t>;</a:t>
+            </a:r>
+            <a:endParaRPr lang="nl-NL" dirty="0">
+              <a:solidFill>
+                <a:srgbClr val="000000"/>
+              </a:solidFill>
+              <a:highlight>
+                <a:srgbClr val="FFFFFF"/>
+              </a:highlight>
+            </a:endParaRPr>
+          </a:p>
+          <a:p>
+            <a:pPr marL="0" indent="0">
+              <a:buNone/>
+            </a:pPr>
+            <a:r>
+              <a:rPr lang="nl-NL" dirty="0">
+                <a:solidFill>
+                  <a:srgbClr val="000000"/>
+                </a:solidFill>
+                <a:highlight>
+                  <a:srgbClr val="FFFFFF"/>
+                </a:highlight>
+              </a:rPr>
+              <a:t>    </a:t>
+            </a:r>
+            <a:r>
+              <a:rPr lang="nl-NL" b="1" dirty="0">
+                <a:solidFill>
+                  <a:srgbClr val="0000FF"/>
+                </a:solidFill>
+                <a:highlight>
+                  <a:srgbClr val="FFFFFF"/>
+                </a:highlight>
+              </a:rPr>
+              <a:t>while</a:t>
+            </a:r>
+            <a:r>
+              <a:rPr lang="nl-NL" dirty="0">
+                <a:solidFill>
+                  <a:srgbClr val="000000"/>
+                </a:solidFill>
+                <a:highlight>
+                  <a:srgbClr val="FFFFFF"/>
+                </a:highlight>
+              </a:rPr>
+              <a:t> </a:t>
+            </a:r>
+            <a:r>
+              <a:rPr lang="nl-NL" b="1" dirty="0">
+                <a:solidFill>
+                  <a:srgbClr val="000080"/>
+                </a:solidFill>
+                <a:highlight>
+                  <a:srgbClr val="FFFFFF"/>
+                </a:highlight>
+              </a:rPr>
+              <a:t>(</a:t>
+            </a:r>
+            <a:r>
+              <a:rPr lang="nl-NL" dirty="0">
+                <a:solidFill>
+                  <a:srgbClr val="000000"/>
+                </a:solidFill>
+                <a:highlight>
+                  <a:srgbClr val="FFFFFF"/>
+                </a:highlight>
+              </a:rPr>
+              <a:t> !file.eof()</a:t>
+            </a:r>
+            <a:r>
+              <a:rPr lang="nl-NL" b="1" dirty="0">
+                <a:solidFill>
+                  <a:srgbClr val="000080"/>
+                </a:solidFill>
+                <a:highlight>
+                  <a:srgbClr val="FFFFFF"/>
+                </a:highlight>
+              </a:rPr>
+              <a:t>)</a:t>
+            </a:r>
+            <a:r>
+              <a:rPr lang="nl-NL" dirty="0">
+                <a:solidFill>
+                  <a:srgbClr val="000000"/>
+                </a:solidFill>
+                <a:highlight>
+                  <a:srgbClr val="FFFFFF"/>
+                </a:highlight>
+              </a:rPr>
+              <a:t> </a:t>
+            </a:r>
+            <a:r>
+              <a:rPr lang="nl-NL" b="1" dirty="0">
+                <a:solidFill>
+                  <a:srgbClr val="000080"/>
+                </a:solidFill>
+                <a:highlight>
+                  <a:srgbClr val="FFFFFF"/>
+                </a:highlight>
+              </a:rPr>
+              <a:t>){</a:t>
+            </a:r>
+          </a:p>
+          <a:p>
+            <a:pPr marL="0" indent="0">
+              <a:buNone/>
+            </a:pPr>
+            <a:r>
+              <a:rPr lang="nl-NL" dirty="0">
+                <a:solidFill>
+                  <a:srgbClr val="000000"/>
+                </a:solidFill>
+                <a:highlight>
+                  <a:srgbClr val="FFFFFF"/>
+                </a:highlight>
+              </a:rPr>
+              <a:t>	getline </a:t>
+            </a:r>
+            <a:r>
+              <a:rPr lang="nl-NL" b="1" dirty="0">
+                <a:solidFill>
+                  <a:srgbClr val="000080"/>
+                </a:solidFill>
+                <a:highlight>
+                  <a:srgbClr val="FFFFFF"/>
+                </a:highlight>
+              </a:rPr>
+              <a:t>(</a:t>
+            </a:r>
+            <a:r>
+              <a:rPr lang="nl-NL" dirty="0">
+                <a:solidFill>
+                  <a:srgbClr val="000000"/>
+                </a:solidFill>
+                <a:highlight>
+                  <a:srgbClr val="FFFFFF"/>
+                </a:highlight>
+              </a:rPr>
+              <a:t>file</a:t>
+            </a:r>
+            <a:r>
+              <a:rPr lang="nl-NL" b="1" dirty="0">
+                <a:solidFill>
+                  <a:srgbClr val="000080"/>
+                </a:solidFill>
+                <a:highlight>
+                  <a:srgbClr val="FFFFFF"/>
+                </a:highlight>
+              </a:rPr>
+              <a:t>,</a:t>
+            </a:r>
+            <a:r>
+              <a:rPr lang="nl-NL" dirty="0">
+                <a:solidFill>
+                  <a:srgbClr val="000000"/>
+                </a:solidFill>
+                <a:highlight>
+                  <a:srgbClr val="FFFFFF"/>
+                </a:highlight>
+              </a:rPr>
+              <a:t> line</a:t>
+            </a:r>
+            <a:r>
+              <a:rPr lang="nl-NL" b="1" dirty="0">
+                <a:solidFill>
+                  <a:srgbClr val="000080"/>
+                </a:solidFill>
+                <a:highlight>
+                  <a:srgbClr val="FFFFFF"/>
+                </a:highlight>
+              </a:rPr>
+              <a:t>);</a:t>
+            </a:r>
+            <a:endParaRPr lang="nl-NL" dirty="0">
+              <a:solidFill>
+                <a:srgbClr val="000000"/>
+              </a:solidFill>
+              <a:highlight>
+                <a:srgbClr val="FFFFFF"/>
+              </a:highlight>
+            </a:endParaRPr>
+          </a:p>
+          <a:p>
+            <a:pPr marL="0" indent="0">
+              <a:buNone/>
+            </a:pPr>
+            <a:r>
+              <a:rPr lang="nl-NL" dirty="0">
+                <a:solidFill>
+                  <a:srgbClr val="000000"/>
+                </a:solidFill>
+                <a:highlight>
+                  <a:srgbClr val="FFFFFF"/>
+                </a:highlight>
+              </a:rPr>
+              <a:t>            cout </a:t>
+            </a:r>
+            <a:r>
+              <a:rPr lang="nl-NL" b="1" dirty="0">
+                <a:solidFill>
+                  <a:srgbClr val="000080"/>
+                </a:solidFill>
+                <a:highlight>
+                  <a:srgbClr val="FFFFFF"/>
+                </a:highlight>
+              </a:rPr>
+              <a:t>&lt;&lt;</a:t>
+            </a:r>
+            <a:r>
+              <a:rPr lang="nl-NL" dirty="0">
+                <a:solidFill>
+                  <a:srgbClr val="000000"/>
+                </a:solidFill>
+                <a:highlight>
+                  <a:srgbClr val="FFFFFF"/>
+                </a:highlight>
+              </a:rPr>
+              <a:t> line </a:t>
+            </a:r>
+            <a:r>
+              <a:rPr lang="nl-NL" b="1" dirty="0">
+                <a:solidFill>
+                  <a:srgbClr val="000080"/>
+                </a:solidFill>
+                <a:highlight>
+                  <a:srgbClr val="FFFFFF"/>
+                </a:highlight>
+              </a:rPr>
+              <a:t>&lt;&lt;</a:t>
+            </a:r>
+            <a:r>
+              <a:rPr lang="nl-NL" dirty="0">
+                <a:solidFill>
+                  <a:srgbClr val="000000"/>
+                </a:solidFill>
+                <a:highlight>
+                  <a:srgbClr val="FFFFFF"/>
+                </a:highlight>
+              </a:rPr>
+              <a:t> </a:t>
+            </a:r>
+            <a:r>
+              <a:rPr lang="nl-NL" dirty="0">
+                <a:solidFill>
+                  <a:srgbClr val="808080"/>
+                </a:solidFill>
+                <a:highlight>
+                  <a:srgbClr val="FFFFFF"/>
+                </a:highlight>
+              </a:rPr>
+              <a:t>'\n'</a:t>
+            </a:r>
+            <a:r>
+              <a:rPr lang="nl-NL" b="1" dirty="0">
+                <a:solidFill>
+                  <a:srgbClr val="000080"/>
+                </a:solidFill>
+                <a:highlight>
+                  <a:srgbClr val="FFFFFF"/>
+                </a:highlight>
+              </a:rPr>
+              <a:t>;</a:t>
+            </a:r>
+            <a:endParaRPr lang="nl-NL" dirty="0">
+              <a:solidFill>
+                <a:srgbClr val="000000"/>
+              </a:solidFill>
+              <a:highlight>
+                <a:srgbClr val="FFFFFF"/>
+              </a:highlight>
+            </a:endParaRPr>
+          </a:p>
+          <a:p>
+            <a:pPr marL="0" indent="0">
+              <a:buNone/>
+            </a:pPr>
+            <a:r>
+              <a:rPr lang="en-NL" dirty="0">
+                <a:solidFill>
+                  <a:srgbClr val="000000"/>
+                </a:solidFill>
+                <a:highlight>
+                  <a:srgbClr val="FFFFFF"/>
+                </a:highlight>
+              </a:rPr>
+              <a:t>    </a:t>
+            </a:r>
+            <a:r>
+              <a:rPr lang="en-NL" b="1" dirty="0">
+                <a:solidFill>
+                  <a:srgbClr val="000080"/>
+                </a:solidFill>
+                <a:highlight>
+                  <a:srgbClr val="FFFFFF"/>
+                </a:highlight>
+              </a:rPr>
+              <a:t>}</a:t>
+            </a:r>
+            <a:endParaRPr lang="en-NL" dirty="0">
+              <a:solidFill>
+                <a:srgbClr val="000000"/>
+              </a:solidFill>
+              <a:highlight>
+                <a:srgbClr val="FFFFFF"/>
+              </a:highlight>
+            </a:endParaRPr>
+          </a:p>
+          <a:p>
+            <a:pPr marL="0" indent="0">
+              <a:buNone/>
+            </a:pPr>
+            <a:r>
+              <a:rPr lang="nl-NL" dirty="0">
+                <a:solidFill>
+                  <a:srgbClr val="000000"/>
+                </a:solidFill>
+                <a:highlight>
+                  <a:srgbClr val="FFFFFF"/>
+                </a:highlight>
+              </a:rPr>
+              <a:t>    f</a:t>
+            </a:r>
+            <a:r>
+              <a:rPr lang="nl-NL" b="1" dirty="0">
+                <a:solidFill>
+                  <a:srgbClr val="000080"/>
+                </a:solidFill>
+                <a:highlight>
+                  <a:srgbClr val="FFFFFF"/>
+                </a:highlight>
+              </a:rPr>
+              <a:t>.</a:t>
+            </a:r>
+            <a:r>
+              <a:rPr lang="nl-NL" dirty="0">
+                <a:solidFill>
+                  <a:srgbClr val="000000"/>
+                </a:solidFill>
+                <a:highlight>
+                  <a:srgbClr val="FFFFFF"/>
+                </a:highlight>
+              </a:rPr>
+              <a:t>close</a:t>
+            </a:r>
+            <a:r>
+              <a:rPr lang="nl-NL" b="1" dirty="0">
+                <a:solidFill>
+                  <a:srgbClr val="000080"/>
+                </a:solidFill>
+                <a:highlight>
+                  <a:srgbClr val="FFFFFF"/>
+                </a:highlight>
+              </a:rPr>
+              <a:t>();</a:t>
+            </a:r>
+            <a:endParaRPr lang="nl-NL" dirty="0">
+              <a:solidFill>
+                <a:srgbClr val="000000"/>
+              </a:solidFill>
+              <a:highlight>
+                <a:srgbClr val="FFFFFF"/>
+              </a:highlight>
+            </a:endParaRPr>
+          </a:p>
+          <a:p>
+            <a:pPr marL="0" indent="0">
+              <a:buNone/>
+            </a:pPr>
+            <a:r>
+              <a:rPr lang="en-NL" b="1" dirty="0">
+                <a:solidFill>
+                  <a:srgbClr val="000080"/>
+                </a:solidFill>
+                <a:highlight>
+                  <a:srgbClr val="FFFFFF"/>
+                </a:highlight>
+              </a:rPr>
+              <a:t>}</a:t>
+            </a:r>
+            <a:endParaRPr lang="en-US" b="1" dirty="0">
+              <a:solidFill>
+                <a:srgbClr val="000080"/>
+              </a:solidFill>
+              <a:highlight>
+                <a:srgbClr val="FFFFFF"/>
+              </a:highlight>
+            </a:endParaRPr>
+          </a:p>
+          <a:p>
+            <a:pPr marL="0" indent="0">
+              <a:buNone/>
+            </a:pPr>
+            <a:endParaRPr lang="en-US" b="1" dirty="0">
+              <a:solidFill>
+                <a:srgbClr val="000080"/>
+              </a:solidFill>
+              <a:highlight>
+                <a:srgbClr val="FFFFFF"/>
+              </a:highlight>
+            </a:endParaRPr>
+          </a:p>
+        </p:txBody>
+      </p:sp>
+    </p:spTree>
+    <p:extLst>
+      <p:ext uri="{BB962C8B-B14F-4D97-AF65-F5344CB8AC3E}">
+        <p14:creationId xmlns:p14="http://schemas.microsoft.com/office/powerpoint/2010/main" val="2477597247"/>
+      </p:ext>
+    </p:extLst>
+  </p:cSld>
+  <p:clrMapOvr>
+    <a:masterClrMapping/>
+  </p:clrMapOvr>
+</p:sld>
+</file>
+
+<file path=ppt/slides/slide12.xml><?xml version="1.0" encoding="utf-8"?>
+<p:sld xmlns:a="http://schemas.openxmlformats.org/drawingml/2006/main" xmlns:r="http://schemas.openxmlformats.org/officeDocument/2006/relationships" xmlns:p="http://schemas.openxmlformats.org/presentationml/2006/main">
+  <p:cSld>
+    <p:spTree>
+      <p:nvGrpSpPr>
+        <p:cNvPr id="1" name="">
+          <a:extLst>
+            <a:ext uri="{FF2B5EF4-FFF2-40B4-BE49-F238E27FC236}">
+              <a16:creationId xmlns:a16="http://schemas.microsoft.com/office/drawing/2014/main" id="{77F35A8A-2CAD-9ECA-4143-FE7F4BC9832B}"/>
+            </a:ext>
+          </a:extLst>
+        </p:cNvPr>
+        <p:cNvGrpSpPr/>
+        <p:nvPr/>
+      </p:nvGrpSpPr>
+      <p:grpSpPr>
+        <a:xfrm>
+          <a:off x="0" y="0"/>
+          <a:ext cx="0" cy="0"/>
+          <a:chOff x="0" y="0"/>
+          <a:chExt cx="0" cy="0"/>
+        </a:xfrm>
+      </p:grpSpPr>
+      <p:sp>
+        <p:nvSpPr>
+          <p:cNvPr id="7" name="Title 6">
+            <a:extLst>
+              <a:ext uri="{FF2B5EF4-FFF2-40B4-BE49-F238E27FC236}">
+                <a16:creationId xmlns:a16="http://schemas.microsoft.com/office/drawing/2014/main" id="{6C26AF59-2F6D-219E-14CB-3DD378AAD5E6}"/>
+              </a:ext>
+            </a:extLst>
+          </p:cNvPr>
+          <p:cNvSpPr>
+            <a:spLocks noGrp="1"/>
+          </p:cNvSpPr>
+          <p:nvPr>
+            <p:ph type="title"/>
+          </p:nvPr>
+        </p:nvSpPr>
+        <p:spPr/>
+        <p:txBody>
+          <a:bodyPr/>
+          <a:lstStyle/>
+          <a:p>
+            <a:r>
+              <a:rPr lang="en-US" dirty="0"/>
+              <a:t>File I/</a:t>
+            </a:r>
+            <a:r>
+              <a:rPr lang="en-US" strike="sngStrike" dirty="0"/>
+              <a:t>O</a:t>
+            </a:r>
+            <a:endParaRPr lang="en-NL" strike="sngStrike" dirty="0"/>
+          </a:p>
+        </p:txBody>
+      </p:sp>
+      <p:sp>
+        <p:nvSpPr>
+          <p:cNvPr id="8" name="Content Placeholder 7">
+            <a:extLst>
+              <a:ext uri="{FF2B5EF4-FFF2-40B4-BE49-F238E27FC236}">
+                <a16:creationId xmlns:a16="http://schemas.microsoft.com/office/drawing/2014/main" id="{BB041023-955B-9A36-1C7F-6B87B32778AF}"/>
+              </a:ext>
+            </a:extLst>
+          </p:cNvPr>
+          <p:cNvSpPr>
+            <a:spLocks noGrp="1"/>
+          </p:cNvSpPr>
+          <p:nvPr>
+            <p:ph idx="1"/>
+          </p:nvPr>
+        </p:nvSpPr>
+        <p:spPr/>
+        <p:txBody>
+          <a:bodyPr>
+            <a:normAutofit fontScale="77500" lnSpcReduction="20000"/>
+          </a:bodyPr>
+          <a:lstStyle/>
+          <a:p>
+            <a:pPr marL="0" indent="0">
+              <a:buNone/>
+            </a:pPr>
+            <a:r>
+              <a:rPr lang="nl-NL" sz="2800" b="0" dirty="0">
+                <a:solidFill>
+                  <a:srgbClr val="000000"/>
+                </a:solidFill>
+                <a:highlight>
+                  <a:srgbClr val="FFFFFF"/>
+                </a:highlight>
+              </a:rPr>
+              <a:t>ifstream file</a:t>
+            </a:r>
+            <a:r>
+              <a:rPr lang="nl-NL" sz="2800" b="1" dirty="0">
+                <a:solidFill>
+                  <a:srgbClr val="000080"/>
+                </a:solidFill>
+                <a:highlight>
+                  <a:srgbClr val="FFFFFF"/>
+                </a:highlight>
+              </a:rPr>
+              <a:t>(</a:t>
+            </a:r>
+            <a:r>
+              <a:rPr lang="nl-NL" sz="2800" b="0" dirty="0">
+                <a:solidFill>
+                  <a:srgbClr val="808080"/>
+                </a:solidFill>
+                <a:highlight>
+                  <a:srgbClr val="FFFFFF"/>
+                </a:highlight>
+              </a:rPr>
+              <a:t>"data.txt"</a:t>
+            </a:r>
+            <a:r>
+              <a:rPr lang="nl-NL" sz="2800" b="1" dirty="0">
+                <a:solidFill>
+                  <a:srgbClr val="000080"/>
+                </a:solidFill>
+                <a:highlight>
+                  <a:srgbClr val="FFFFFF"/>
+                </a:highlight>
+              </a:rPr>
+              <a:t>);</a:t>
+            </a:r>
+            <a:endParaRPr lang="nl-NL" sz="2800" b="0" dirty="0">
+              <a:solidFill>
+                <a:srgbClr val="000000"/>
+              </a:solidFill>
+              <a:highlight>
+                <a:srgbClr val="FFFFFF"/>
+              </a:highlight>
+            </a:endParaRPr>
+          </a:p>
+          <a:p>
+            <a:pPr marL="0" indent="0">
+              <a:buNone/>
+            </a:pPr>
+            <a:endParaRPr lang="en-NL" sz="2800" b="0" dirty="0">
+              <a:solidFill>
+                <a:srgbClr val="000000"/>
+              </a:solidFill>
+              <a:highlight>
+                <a:srgbClr val="FFFFFF"/>
+              </a:highlight>
+            </a:endParaRPr>
+          </a:p>
+          <a:p>
+            <a:pPr marL="0" indent="0">
+              <a:buNone/>
+            </a:pPr>
+            <a:r>
+              <a:rPr lang="nl-NL" sz="2800" b="1" dirty="0">
+                <a:solidFill>
+                  <a:srgbClr val="0000FF"/>
+                </a:solidFill>
+                <a:highlight>
+                  <a:srgbClr val="FFFFFF"/>
+                </a:highlight>
+              </a:rPr>
+              <a:t>if</a:t>
+            </a:r>
+            <a:r>
+              <a:rPr lang="nl-NL" sz="2800" b="0" dirty="0">
+                <a:solidFill>
+                  <a:srgbClr val="000000"/>
+                </a:solidFill>
+                <a:highlight>
+                  <a:srgbClr val="FFFFFF"/>
+                </a:highlight>
+              </a:rPr>
+              <a:t> </a:t>
+            </a:r>
+            <a:r>
+              <a:rPr lang="nl-NL" sz="2800" b="1" dirty="0">
+                <a:solidFill>
+                  <a:srgbClr val="000080"/>
+                </a:solidFill>
+                <a:highlight>
+                  <a:srgbClr val="FFFFFF"/>
+                </a:highlight>
+              </a:rPr>
+              <a:t>(!</a:t>
+            </a:r>
+            <a:r>
+              <a:rPr lang="nl-NL" sz="2800" b="0" dirty="0">
+                <a:solidFill>
+                  <a:srgbClr val="000000"/>
+                </a:solidFill>
+                <a:highlight>
+                  <a:srgbClr val="FFFFFF"/>
+                </a:highlight>
+              </a:rPr>
+              <a:t>file</a:t>
+            </a:r>
+            <a:r>
+              <a:rPr lang="nl-NL" sz="2800" b="1" dirty="0">
+                <a:solidFill>
+                  <a:srgbClr val="000080"/>
+                </a:solidFill>
+                <a:highlight>
+                  <a:srgbClr val="FFFFFF"/>
+                </a:highlight>
+              </a:rPr>
+              <a:t>.</a:t>
+            </a:r>
+            <a:r>
+              <a:rPr lang="nl-NL" sz="2800" b="0" dirty="0">
+                <a:solidFill>
+                  <a:srgbClr val="000000"/>
+                </a:solidFill>
+                <a:highlight>
+                  <a:srgbClr val="FFFFFF"/>
+                </a:highlight>
+              </a:rPr>
+              <a:t>is_open</a:t>
+            </a:r>
+            <a:r>
+              <a:rPr lang="nl-NL" sz="2800" b="1" dirty="0">
+                <a:solidFill>
+                  <a:srgbClr val="000080"/>
+                </a:solidFill>
+                <a:highlight>
+                  <a:srgbClr val="FFFFFF"/>
+                </a:highlight>
+              </a:rPr>
+              <a:t>())</a:t>
+            </a:r>
+            <a:r>
+              <a:rPr lang="nl-NL" sz="2800" b="0" dirty="0">
+                <a:solidFill>
+                  <a:srgbClr val="000000"/>
+                </a:solidFill>
+                <a:highlight>
+                  <a:srgbClr val="FFFFFF"/>
+                </a:highlight>
+              </a:rPr>
+              <a:t> </a:t>
+            </a:r>
+            <a:r>
+              <a:rPr lang="nl-NL" sz="2800" b="1" dirty="0">
+                <a:solidFill>
+                  <a:srgbClr val="000080"/>
+                </a:solidFill>
+                <a:highlight>
+                  <a:srgbClr val="FFFFFF"/>
+                </a:highlight>
+              </a:rPr>
+              <a:t>{</a:t>
+            </a:r>
+            <a:endParaRPr lang="nl-NL" sz="2800" b="0" dirty="0">
+              <a:solidFill>
+                <a:srgbClr val="000000"/>
+              </a:solidFill>
+              <a:highlight>
+                <a:srgbClr val="FFFFFF"/>
+              </a:highlight>
+            </a:endParaRPr>
+          </a:p>
+          <a:p>
+            <a:pPr marL="0" indent="0">
+              <a:buNone/>
+            </a:pPr>
+            <a:r>
+              <a:rPr lang="en-US" sz="2800" b="0" dirty="0">
+                <a:solidFill>
+                  <a:srgbClr val="000000"/>
+                </a:solidFill>
+                <a:highlight>
+                  <a:srgbClr val="FFFFFF"/>
+                </a:highlight>
+              </a:rPr>
+              <a:t>    </a:t>
+            </a:r>
+            <a:r>
+              <a:rPr lang="en-US" sz="2800" b="0" dirty="0" err="1">
+                <a:solidFill>
+                  <a:srgbClr val="000000"/>
+                </a:solidFill>
+                <a:highlight>
+                  <a:srgbClr val="FFFFFF"/>
+                </a:highlight>
+              </a:rPr>
+              <a:t>cout</a:t>
+            </a:r>
+            <a:r>
+              <a:rPr lang="en-US" sz="2800" b="0" dirty="0">
+                <a:solidFill>
+                  <a:srgbClr val="000000"/>
+                </a:solidFill>
+                <a:highlight>
+                  <a:srgbClr val="FFFFFF"/>
+                </a:highlight>
+              </a:rPr>
+              <a:t> </a:t>
+            </a:r>
+            <a:r>
+              <a:rPr lang="en-US" sz="2800" b="1" dirty="0">
+                <a:solidFill>
+                  <a:srgbClr val="000080"/>
+                </a:solidFill>
+                <a:highlight>
+                  <a:srgbClr val="FFFFFF"/>
+                </a:highlight>
+              </a:rPr>
+              <a:t>&lt;&lt;</a:t>
+            </a:r>
+            <a:r>
+              <a:rPr lang="en-US" sz="2800" b="0" dirty="0">
+                <a:solidFill>
+                  <a:srgbClr val="000000"/>
+                </a:solidFill>
+                <a:highlight>
+                  <a:srgbClr val="FFFFFF"/>
+                </a:highlight>
+              </a:rPr>
+              <a:t> </a:t>
+            </a:r>
+            <a:r>
+              <a:rPr lang="en-US" sz="2800" b="0" dirty="0">
+                <a:solidFill>
+                  <a:srgbClr val="808080"/>
+                </a:solidFill>
+                <a:highlight>
+                  <a:srgbClr val="FFFFFF"/>
+                </a:highlight>
+              </a:rPr>
+              <a:t>"Error opening file.\n"</a:t>
+            </a:r>
+            <a:r>
+              <a:rPr lang="en-US" sz="2800" b="1" dirty="0">
+                <a:solidFill>
+                  <a:srgbClr val="000080"/>
+                </a:solidFill>
+                <a:highlight>
+                  <a:srgbClr val="FFFFFF"/>
+                </a:highlight>
+              </a:rPr>
+              <a:t>;</a:t>
+            </a:r>
+            <a:endParaRPr lang="en-US" sz="2800" b="0" dirty="0">
+              <a:solidFill>
+                <a:srgbClr val="000000"/>
+              </a:solidFill>
+              <a:highlight>
+                <a:srgbClr val="FFFFFF"/>
+              </a:highlight>
+            </a:endParaRPr>
+          </a:p>
+          <a:p>
+            <a:pPr marL="0" indent="0">
+              <a:buNone/>
+            </a:pPr>
+            <a:r>
+              <a:rPr lang="nl-NL" sz="2800" b="0" dirty="0">
+                <a:solidFill>
+                  <a:srgbClr val="000000"/>
+                </a:solidFill>
+                <a:highlight>
+                  <a:srgbClr val="FFFFFF"/>
+                </a:highlight>
+              </a:rPr>
+              <a:t>    </a:t>
+            </a:r>
+            <a:r>
+              <a:rPr lang="nl-NL" sz="2800" b="1" dirty="0">
+                <a:solidFill>
+                  <a:srgbClr val="0000FF"/>
+                </a:solidFill>
+                <a:highlight>
+                  <a:srgbClr val="FFFFFF"/>
+                </a:highlight>
+              </a:rPr>
+              <a:t>return</a:t>
+            </a:r>
+            <a:r>
+              <a:rPr lang="nl-NL" sz="2800" b="0" dirty="0">
+                <a:solidFill>
+                  <a:srgbClr val="000000"/>
+                </a:solidFill>
+                <a:highlight>
+                  <a:srgbClr val="FFFFFF"/>
+                </a:highlight>
+              </a:rPr>
+              <a:t> </a:t>
+            </a:r>
+            <a:r>
+              <a:rPr lang="nl-NL" sz="2800" b="0" dirty="0">
+                <a:solidFill>
+                  <a:srgbClr val="FF8000"/>
+                </a:solidFill>
+                <a:highlight>
+                  <a:srgbClr val="FFFFFF"/>
+                </a:highlight>
+              </a:rPr>
+              <a:t>1</a:t>
+            </a:r>
+            <a:r>
+              <a:rPr lang="nl-NL" sz="2800" b="1" dirty="0">
+                <a:solidFill>
+                  <a:srgbClr val="000080"/>
+                </a:solidFill>
+                <a:highlight>
+                  <a:srgbClr val="FFFFFF"/>
+                </a:highlight>
+              </a:rPr>
+              <a:t>;</a:t>
+            </a:r>
+            <a:endParaRPr lang="nl-NL" sz="2800" b="0" dirty="0">
+              <a:solidFill>
+                <a:srgbClr val="000000"/>
+              </a:solidFill>
+              <a:highlight>
+                <a:srgbClr val="FFFFFF"/>
+              </a:highlight>
+            </a:endParaRPr>
+          </a:p>
+          <a:p>
+            <a:pPr marL="0" indent="0">
+              <a:buNone/>
+            </a:pPr>
+            <a:r>
+              <a:rPr lang="en-NL" sz="2800" b="1" dirty="0">
+                <a:solidFill>
+                  <a:srgbClr val="000080"/>
+                </a:solidFill>
+                <a:highlight>
+                  <a:srgbClr val="FFFFFF"/>
+                </a:highlight>
+              </a:rPr>
+              <a:t>}</a:t>
+            </a:r>
+            <a:endParaRPr lang="en-NL" sz="2800" b="0" dirty="0">
+              <a:solidFill>
+                <a:srgbClr val="000000"/>
+              </a:solidFill>
+              <a:highlight>
+                <a:srgbClr val="FFFFFF"/>
+              </a:highlight>
+            </a:endParaRPr>
+          </a:p>
+          <a:p>
+            <a:pPr marL="0" indent="0">
+              <a:buNone/>
+            </a:pPr>
+            <a:endParaRPr lang="en-NL" sz="2800" b="0" dirty="0">
+              <a:solidFill>
+                <a:srgbClr val="000000"/>
+              </a:solidFill>
+              <a:highlight>
+                <a:srgbClr val="FFFFFF"/>
+              </a:highlight>
+            </a:endParaRPr>
+          </a:p>
+          <a:p>
+            <a:pPr marL="0" indent="0">
+              <a:buNone/>
+            </a:pPr>
+            <a:r>
+              <a:rPr lang="nl-NL" sz="2800" b="0" dirty="0">
+                <a:solidFill>
+                  <a:srgbClr val="000000"/>
+                </a:solidFill>
+                <a:highlight>
+                  <a:srgbClr val="FFFFFF"/>
+                </a:highlight>
+              </a:rPr>
+              <a:t>string word</a:t>
+            </a:r>
+            <a:r>
+              <a:rPr lang="nl-NL" sz="2800" b="1" dirty="0">
+                <a:solidFill>
+                  <a:srgbClr val="000080"/>
+                </a:solidFill>
+                <a:highlight>
+                  <a:srgbClr val="FFFFFF"/>
+                </a:highlight>
+              </a:rPr>
+              <a:t>;</a:t>
+            </a:r>
+            <a:endParaRPr lang="nl-NL" sz="2800" b="0" dirty="0">
+              <a:solidFill>
+                <a:srgbClr val="000000"/>
+              </a:solidFill>
+              <a:highlight>
+                <a:srgbClr val="FFFFFF"/>
+              </a:highlight>
+            </a:endParaRPr>
+          </a:p>
+          <a:p>
+            <a:pPr marL="0" indent="0">
+              <a:buNone/>
+            </a:pPr>
+            <a:endParaRPr lang="en-NL" sz="2800" b="0" dirty="0">
+              <a:solidFill>
+                <a:srgbClr val="000000"/>
+              </a:solidFill>
+              <a:highlight>
+                <a:srgbClr val="FFFFFF"/>
+              </a:highlight>
+            </a:endParaRPr>
+          </a:p>
+          <a:p>
+            <a:pPr marL="0" indent="0">
+              <a:buNone/>
+            </a:pPr>
+            <a:r>
+              <a:rPr lang="nl-NL" sz="2800" b="1" dirty="0">
+                <a:solidFill>
+                  <a:srgbClr val="0000FF"/>
+                </a:solidFill>
+                <a:highlight>
+                  <a:srgbClr val="FFFFFF"/>
+                </a:highlight>
+              </a:rPr>
+              <a:t>while</a:t>
+            </a:r>
+            <a:r>
+              <a:rPr lang="nl-NL" sz="2800" b="0" dirty="0">
+                <a:solidFill>
+                  <a:srgbClr val="000000"/>
+                </a:solidFill>
+                <a:highlight>
+                  <a:srgbClr val="FFFFFF"/>
+                </a:highlight>
+              </a:rPr>
+              <a:t> </a:t>
+            </a:r>
+            <a:r>
+              <a:rPr lang="nl-NL" sz="2800" b="1" dirty="0">
+                <a:solidFill>
+                  <a:srgbClr val="000080"/>
+                </a:solidFill>
+                <a:highlight>
+                  <a:srgbClr val="FFFFFF"/>
+                </a:highlight>
+              </a:rPr>
+              <a:t>(</a:t>
+            </a:r>
+            <a:r>
+              <a:rPr lang="nl-NL" sz="2800" b="0" dirty="0">
+                <a:solidFill>
+                  <a:srgbClr val="000000"/>
+                </a:solidFill>
+                <a:highlight>
+                  <a:srgbClr val="FFFFFF"/>
+                </a:highlight>
+              </a:rPr>
+              <a:t>file </a:t>
+            </a:r>
+            <a:r>
+              <a:rPr lang="nl-NL" sz="2800" b="1" dirty="0">
+                <a:solidFill>
+                  <a:srgbClr val="000080"/>
+                </a:solidFill>
+                <a:highlight>
+                  <a:srgbClr val="FFFFFF"/>
+                </a:highlight>
+              </a:rPr>
+              <a:t>&gt;&gt;</a:t>
+            </a:r>
+            <a:r>
+              <a:rPr lang="nl-NL" sz="2800" b="0" dirty="0">
+                <a:solidFill>
+                  <a:srgbClr val="000000"/>
+                </a:solidFill>
+                <a:highlight>
+                  <a:srgbClr val="FFFFFF"/>
+                </a:highlight>
+              </a:rPr>
+              <a:t> word</a:t>
+            </a:r>
+            <a:r>
+              <a:rPr lang="nl-NL" sz="2800" b="1" dirty="0">
+                <a:solidFill>
+                  <a:srgbClr val="000080"/>
+                </a:solidFill>
+                <a:highlight>
+                  <a:srgbClr val="FFFFFF"/>
+                </a:highlight>
+              </a:rPr>
+              <a:t>)</a:t>
+            </a:r>
+            <a:r>
+              <a:rPr lang="nl-NL" sz="2800" b="0" dirty="0">
+                <a:solidFill>
+                  <a:srgbClr val="000000"/>
+                </a:solidFill>
+                <a:highlight>
+                  <a:srgbClr val="FFFFFF"/>
+                </a:highlight>
+              </a:rPr>
+              <a:t> </a:t>
+            </a:r>
+            <a:r>
+              <a:rPr lang="nl-NL" sz="2800" b="1" dirty="0">
+                <a:solidFill>
+                  <a:srgbClr val="000080"/>
+                </a:solidFill>
+                <a:highlight>
+                  <a:srgbClr val="FFFFFF"/>
+                </a:highlight>
+              </a:rPr>
+              <a:t>{ </a:t>
+            </a:r>
+            <a:r>
+              <a:rPr lang="nl-NL" sz="2800" b="0" dirty="0">
+                <a:solidFill>
+                  <a:srgbClr val="000000"/>
+                </a:solidFill>
+                <a:highlight>
+                  <a:srgbClr val="FFFFFF"/>
+                </a:highlight>
+              </a:rPr>
+              <a:t>cout </a:t>
+            </a:r>
+            <a:r>
+              <a:rPr lang="nl-NL" sz="2800" b="1" dirty="0">
+                <a:solidFill>
+                  <a:srgbClr val="000080"/>
+                </a:solidFill>
+                <a:highlight>
+                  <a:srgbClr val="FFFFFF"/>
+                </a:highlight>
+              </a:rPr>
+              <a:t>&lt;&lt;</a:t>
+            </a:r>
+            <a:r>
+              <a:rPr lang="nl-NL" sz="2800" b="0" dirty="0">
+                <a:solidFill>
+                  <a:srgbClr val="000000"/>
+                </a:solidFill>
+                <a:highlight>
+                  <a:srgbClr val="FFFFFF"/>
+                </a:highlight>
+              </a:rPr>
+              <a:t> word </a:t>
+            </a:r>
+            <a:r>
+              <a:rPr lang="nl-NL" sz="2800" b="1" dirty="0">
+                <a:solidFill>
+                  <a:srgbClr val="000080"/>
+                </a:solidFill>
+                <a:highlight>
+                  <a:srgbClr val="FFFFFF"/>
+                </a:highlight>
+              </a:rPr>
+              <a:t>&lt;&lt;</a:t>
+            </a:r>
+            <a:r>
+              <a:rPr lang="nl-NL" sz="2800" b="0" dirty="0">
+                <a:solidFill>
+                  <a:srgbClr val="000000"/>
+                </a:solidFill>
+                <a:highlight>
+                  <a:srgbClr val="FFFFFF"/>
+                </a:highlight>
+              </a:rPr>
+              <a:t> endl</a:t>
+            </a:r>
+            <a:r>
+              <a:rPr lang="nl-NL" sz="2800" b="1" dirty="0">
+                <a:solidFill>
+                  <a:srgbClr val="000080"/>
+                </a:solidFill>
+                <a:highlight>
+                  <a:srgbClr val="FFFFFF"/>
+                </a:highlight>
+              </a:rPr>
+              <a:t>; </a:t>
+            </a:r>
+            <a:r>
+              <a:rPr lang="en-NL" sz="2800" b="1" dirty="0">
+                <a:solidFill>
+                  <a:srgbClr val="000080"/>
+                </a:solidFill>
+                <a:highlight>
+                  <a:srgbClr val="FFFFFF"/>
+                </a:highlight>
+              </a:rPr>
+              <a:t>}</a:t>
+            </a:r>
+            <a:endParaRPr lang="en-NL" sz="2800" b="0" dirty="0">
+              <a:solidFill>
+                <a:srgbClr val="000000"/>
+              </a:solidFill>
+              <a:highlight>
+                <a:srgbClr val="FFFFFF"/>
+              </a:highlight>
+            </a:endParaRPr>
+          </a:p>
+          <a:p>
+            <a:pPr marL="0" indent="0">
+              <a:buNone/>
+            </a:pPr>
+            <a:endParaRPr lang="en-NL" sz="2800" b="0" dirty="0">
+              <a:solidFill>
+                <a:srgbClr val="000000"/>
+              </a:solidFill>
+              <a:highlight>
+                <a:srgbClr val="FFFFFF"/>
+              </a:highlight>
+            </a:endParaRPr>
+          </a:p>
+          <a:p>
+            <a:pPr marL="0" indent="0">
+              <a:buNone/>
+            </a:pPr>
+            <a:r>
+              <a:rPr lang="nl-NL" sz="2800" b="0" dirty="0">
+                <a:solidFill>
+                  <a:srgbClr val="000000"/>
+                </a:solidFill>
+                <a:highlight>
+                  <a:srgbClr val="FFFFFF"/>
+                </a:highlight>
+              </a:rPr>
+              <a:t>file</a:t>
+            </a:r>
+            <a:r>
+              <a:rPr lang="nl-NL" sz="2800" b="1" dirty="0">
+                <a:solidFill>
+                  <a:srgbClr val="000080"/>
+                </a:solidFill>
+                <a:highlight>
+                  <a:srgbClr val="FFFFFF"/>
+                </a:highlight>
+              </a:rPr>
+              <a:t>.</a:t>
+            </a:r>
+            <a:r>
+              <a:rPr lang="nl-NL" sz="2800" b="0" dirty="0">
+                <a:solidFill>
+                  <a:srgbClr val="000000"/>
+                </a:solidFill>
+                <a:highlight>
+                  <a:srgbClr val="FFFFFF"/>
+                </a:highlight>
+              </a:rPr>
+              <a:t>close</a:t>
+            </a:r>
+            <a:r>
+              <a:rPr lang="nl-NL" sz="2800" b="1" dirty="0">
+                <a:solidFill>
+                  <a:srgbClr val="000080"/>
+                </a:solidFill>
+                <a:highlight>
+                  <a:srgbClr val="FFFFFF"/>
+                </a:highlight>
+              </a:rPr>
+              <a:t>();</a:t>
+            </a:r>
+            <a:endParaRPr lang="en-US" b="1" dirty="0">
+              <a:solidFill>
+                <a:srgbClr val="000080"/>
+              </a:solidFill>
+              <a:highlight>
+                <a:srgbClr val="FFFFFF"/>
+              </a:highlight>
+            </a:endParaRPr>
+          </a:p>
+        </p:txBody>
+      </p:sp>
+    </p:spTree>
+    <p:extLst>
+      <p:ext uri="{BB962C8B-B14F-4D97-AF65-F5344CB8AC3E}">
+        <p14:creationId xmlns:p14="http://schemas.microsoft.com/office/powerpoint/2010/main" val="3995305290"/>
+      </p:ext>
+    </p:extLst>
+  </p:cSld>
+  <p:clrMapOvr>
+    <a:masterClrMapping/>
+  </p:clrMapOvr>
+</p:sld>
+</file>
+
+<file path=ppt/slides/slide13.xml><?xml version="1.0" encoding="utf-8"?>
+<p:sld xmlns:a="http://schemas.openxmlformats.org/drawingml/2006/main" xmlns:r="http://schemas.openxmlformats.org/officeDocument/2006/relationships" xmlns:p="http://schemas.openxmlformats.org/presentationml/2006/main">
+  <p:cSld>
+    <p:spTree>
+      <p:nvGrpSpPr>
+        <p:cNvPr id="1" name="">
+          <a:extLst>
+            <a:ext uri="{FF2B5EF4-FFF2-40B4-BE49-F238E27FC236}">
+              <a16:creationId xmlns:a16="http://schemas.microsoft.com/office/drawing/2014/main" id="{976C6A39-2D1B-E577-472E-1258DA87D817}"/>
+            </a:ext>
+          </a:extLst>
+        </p:cNvPr>
+        <p:cNvGrpSpPr/>
+        <p:nvPr/>
+      </p:nvGrpSpPr>
+      <p:grpSpPr>
+        <a:xfrm>
+          <a:off x="0" y="0"/>
+          <a:ext cx="0" cy="0"/>
+          <a:chOff x="0" y="0"/>
+          <a:chExt cx="0" cy="0"/>
+        </a:xfrm>
+      </p:grpSpPr>
+      <p:sp>
+        <p:nvSpPr>
+          <p:cNvPr id="7" name="Title 6">
+            <a:extLst>
+              <a:ext uri="{FF2B5EF4-FFF2-40B4-BE49-F238E27FC236}">
+                <a16:creationId xmlns:a16="http://schemas.microsoft.com/office/drawing/2014/main" id="{92DE9F08-2B51-2AB3-2528-4A28A4C43845}"/>
+              </a:ext>
+            </a:extLst>
+          </p:cNvPr>
+          <p:cNvSpPr>
+            <a:spLocks noGrp="1"/>
+          </p:cNvSpPr>
+          <p:nvPr>
+            <p:ph type="title"/>
+          </p:nvPr>
+        </p:nvSpPr>
+        <p:spPr/>
+        <p:txBody>
+          <a:bodyPr/>
+          <a:lstStyle/>
+          <a:p>
+            <a:r>
+              <a:rPr lang="en-US" dirty="0"/>
+              <a:t>File I/</a:t>
+            </a:r>
+            <a:r>
+              <a:rPr lang="en-US" strike="sngStrike" dirty="0"/>
+              <a:t>O</a:t>
+            </a:r>
+            <a:endParaRPr lang="en-NL" strike="sngStrike" dirty="0"/>
+          </a:p>
+        </p:txBody>
+      </p:sp>
+      <p:sp>
+        <p:nvSpPr>
+          <p:cNvPr id="8" name="Content Placeholder 7">
+            <a:extLst>
+              <a:ext uri="{FF2B5EF4-FFF2-40B4-BE49-F238E27FC236}">
+                <a16:creationId xmlns:a16="http://schemas.microsoft.com/office/drawing/2014/main" id="{66645F16-E70E-7895-7944-4F953777EC7C}"/>
+              </a:ext>
+            </a:extLst>
+          </p:cNvPr>
+          <p:cNvSpPr>
+            <a:spLocks noGrp="1"/>
+          </p:cNvSpPr>
+          <p:nvPr>
+            <p:ph idx="1"/>
+          </p:nvPr>
+        </p:nvSpPr>
+        <p:spPr/>
+        <p:txBody>
+          <a:bodyPr>
+            <a:normAutofit fontScale="92500" lnSpcReduction="20000"/>
+          </a:bodyPr>
+          <a:lstStyle/>
+          <a:p>
+            <a:pPr marL="0" indent="0">
+              <a:buNone/>
+            </a:pPr>
+            <a:r>
+              <a:rPr lang="nl-NL" sz="2800" b="0" dirty="0">
+                <a:solidFill>
+                  <a:srgbClr val="000000"/>
+                </a:solidFill>
+                <a:highlight>
+                  <a:srgbClr val="FFFFFF"/>
+                </a:highlight>
+              </a:rPr>
+              <a:t>ifstream file</a:t>
+            </a:r>
+            <a:r>
+              <a:rPr lang="nl-NL" sz="2800" b="1" dirty="0">
+                <a:solidFill>
+                  <a:srgbClr val="000080"/>
+                </a:solidFill>
+                <a:highlight>
+                  <a:srgbClr val="FFFFFF"/>
+                </a:highlight>
+              </a:rPr>
+              <a:t>(</a:t>
+            </a:r>
+            <a:r>
+              <a:rPr lang="nl-NL" sz="2800" b="0" dirty="0">
+                <a:solidFill>
+                  <a:srgbClr val="808080"/>
+                </a:solidFill>
+                <a:highlight>
+                  <a:srgbClr val="FFFFFF"/>
+                </a:highlight>
+              </a:rPr>
+              <a:t>"data.txt"</a:t>
+            </a:r>
+            <a:r>
+              <a:rPr lang="nl-NL" sz="2800" b="1" dirty="0">
+                <a:solidFill>
+                  <a:srgbClr val="000080"/>
+                </a:solidFill>
+                <a:highlight>
+                  <a:srgbClr val="FFFFFF"/>
+                </a:highlight>
+              </a:rPr>
+              <a:t>);</a:t>
+            </a:r>
+            <a:br>
+              <a:rPr lang="nl-NL" sz="2800" b="1" dirty="0">
+                <a:solidFill>
+                  <a:srgbClr val="000080"/>
+                </a:solidFill>
+                <a:highlight>
+                  <a:srgbClr val="FFFFFF"/>
+                </a:highlight>
+              </a:rPr>
+            </a:br>
+            <a:br>
+              <a:rPr lang="nl-NL" sz="2800" b="1" dirty="0">
+                <a:solidFill>
+                  <a:srgbClr val="000080"/>
+                </a:solidFill>
+                <a:highlight>
+                  <a:srgbClr val="FFFFFF"/>
+                </a:highlight>
+              </a:rPr>
+            </a:br>
+            <a:r>
+              <a:rPr lang="en-US" sz="2800" b="0" dirty="0">
+                <a:solidFill>
+                  <a:srgbClr val="000000"/>
+                </a:solidFill>
+                <a:highlight>
+                  <a:srgbClr val="FFFFFF"/>
+                </a:highlight>
+              </a:rPr>
+              <a:t>…</a:t>
+            </a:r>
+            <a:br>
+              <a:rPr lang="en-US" sz="2800" b="0" dirty="0">
+                <a:solidFill>
+                  <a:srgbClr val="000000"/>
+                </a:solidFill>
+                <a:highlight>
+                  <a:srgbClr val="FFFFFF"/>
+                </a:highlight>
+              </a:rPr>
+            </a:br>
+            <a:endParaRPr lang="en-NL" sz="2800" b="0" dirty="0">
+              <a:solidFill>
+                <a:srgbClr val="000000"/>
+              </a:solidFill>
+              <a:highlight>
+                <a:srgbClr val="FFFFFF"/>
+              </a:highlight>
+            </a:endParaRPr>
+          </a:p>
+          <a:p>
+            <a:pPr marL="0" indent="0">
+              <a:buNone/>
+            </a:pPr>
+            <a:r>
+              <a:rPr lang="nl-NL" sz="2800" dirty="0">
+                <a:solidFill>
+                  <a:srgbClr val="000000"/>
+                </a:solidFill>
+                <a:highlight>
+                  <a:srgbClr val="FFFFFF"/>
+                </a:highlight>
+              </a:rPr>
+              <a:t>string name</a:t>
+            </a:r>
+            <a:r>
+              <a:rPr lang="nl-NL" sz="2800" b="1" dirty="0">
+                <a:solidFill>
+                  <a:srgbClr val="000080"/>
+                </a:solidFill>
+                <a:highlight>
+                  <a:srgbClr val="FFFFFF"/>
+                </a:highlight>
+              </a:rPr>
+              <a:t>;</a:t>
+            </a:r>
+            <a:endParaRPr lang="nl-NL" sz="2800" b="0" dirty="0">
+              <a:solidFill>
+                <a:srgbClr val="000000"/>
+              </a:solidFill>
+              <a:highlight>
+                <a:srgbClr val="FFFFFF"/>
+              </a:highlight>
+            </a:endParaRPr>
+          </a:p>
+          <a:p>
+            <a:pPr marL="0" indent="0">
+              <a:buNone/>
+            </a:pPr>
+            <a:r>
+              <a:rPr lang="nl-NL" sz="2800" b="0" dirty="0">
+                <a:solidFill>
+                  <a:srgbClr val="8000FF"/>
+                </a:solidFill>
+                <a:highlight>
+                  <a:srgbClr val="FFFFFF"/>
+                </a:highlight>
+              </a:rPr>
+              <a:t>int</a:t>
+            </a:r>
+            <a:r>
+              <a:rPr lang="nl-NL" sz="2800" b="0" dirty="0">
+                <a:solidFill>
+                  <a:srgbClr val="000000"/>
+                </a:solidFill>
+                <a:highlight>
+                  <a:srgbClr val="FFFFFF"/>
+                </a:highlight>
+              </a:rPr>
+              <a:t> grade</a:t>
+            </a:r>
+            <a:r>
+              <a:rPr lang="nl-NL" sz="2800" b="1" dirty="0">
+                <a:solidFill>
+                  <a:srgbClr val="000080"/>
+                </a:solidFill>
+                <a:highlight>
+                  <a:srgbClr val="FFFFFF"/>
+                </a:highlight>
+              </a:rPr>
+              <a:t>;</a:t>
+            </a:r>
+            <a:endParaRPr lang="nl-NL" sz="2800" b="0" dirty="0">
+              <a:solidFill>
+                <a:srgbClr val="000000"/>
+              </a:solidFill>
+              <a:highlight>
+                <a:srgbClr val="FFFFFF"/>
+              </a:highlight>
+            </a:endParaRPr>
+          </a:p>
+          <a:p>
+            <a:pPr marL="0" indent="0">
+              <a:buNone/>
+            </a:pPr>
+            <a:endParaRPr lang="en-NL" sz="2800" b="0" dirty="0">
+              <a:solidFill>
+                <a:srgbClr val="000000"/>
+              </a:solidFill>
+              <a:highlight>
+                <a:srgbClr val="FFFFFF"/>
+              </a:highlight>
+            </a:endParaRPr>
+          </a:p>
+          <a:p>
+            <a:pPr marL="0" indent="0">
+              <a:buNone/>
+            </a:pPr>
+            <a:r>
+              <a:rPr lang="nl-NL" sz="2800" b="1" dirty="0">
+                <a:solidFill>
+                  <a:srgbClr val="0000FF"/>
+                </a:solidFill>
+                <a:highlight>
+                  <a:srgbClr val="FFFFFF"/>
+                </a:highlight>
+              </a:rPr>
+              <a:t>while</a:t>
+            </a:r>
+            <a:r>
+              <a:rPr lang="nl-NL" sz="2800" b="0" dirty="0">
+                <a:solidFill>
+                  <a:srgbClr val="000000"/>
+                </a:solidFill>
+                <a:highlight>
+                  <a:srgbClr val="FFFFFF"/>
+                </a:highlight>
+              </a:rPr>
+              <a:t> </a:t>
+            </a:r>
+            <a:r>
+              <a:rPr lang="nl-NL" sz="2800" b="1" dirty="0">
+                <a:solidFill>
+                  <a:srgbClr val="000080"/>
+                </a:solidFill>
+                <a:highlight>
+                  <a:srgbClr val="FFFFFF"/>
+                </a:highlight>
+              </a:rPr>
+              <a:t>(</a:t>
+            </a:r>
+            <a:r>
+              <a:rPr lang="nl-NL" sz="2800" b="0" dirty="0">
+                <a:solidFill>
+                  <a:srgbClr val="000000"/>
+                </a:solidFill>
+                <a:highlight>
+                  <a:srgbClr val="FFFFFF"/>
+                </a:highlight>
+              </a:rPr>
+              <a:t>file </a:t>
+            </a:r>
+            <a:r>
+              <a:rPr lang="nl-NL" sz="2800" b="1" dirty="0">
+                <a:solidFill>
+                  <a:srgbClr val="000080"/>
+                </a:solidFill>
+                <a:highlight>
+                  <a:srgbClr val="FFFFFF"/>
+                </a:highlight>
+              </a:rPr>
+              <a:t>&gt;&gt;</a:t>
+            </a:r>
+            <a:r>
+              <a:rPr lang="nl-NL" sz="2800" b="0" dirty="0">
+                <a:solidFill>
+                  <a:srgbClr val="000000"/>
+                </a:solidFill>
+                <a:highlight>
+                  <a:srgbClr val="FFFFFF"/>
+                </a:highlight>
+              </a:rPr>
+              <a:t> name </a:t>
+            </a:r>
+            <a:r>
+              <a:rPr lang="nl-NL" sz="2800" b="1" dirty="0">
+                <a:solidFill>
+                  <a:srgbClr val="000080"/>
+                </a:solidFill>
+                <a:highlight>
+                  <a:srgbClr val="FFFFFF"/>
+                </a:highlight>
+              </a:rPr>
+              <a:t>&gt;&gt;</a:t>
+            </a:r>
+            <a:r>
+              <a:rPr lang="nl-NL" sz="2800" b="0" dirty="0">
+                <a:solidFill>
+                  <a:srgbClr val="000000"/>
+                </a:solidFill>
+                <a:highlight>
+                  <a:srgbClr val="FFFFFF"/>
+                </a:highlight>
+              </a:rPr>
+              <a:t> grade</a:t>
+            </a:r>
+            <a:r>
+              <a:rPr lang="nl-NL" sz="2800" b="1" dirty="0">
+                <a:solidFill>
+                  <a:srgbClr val="000080"/>
+                </a:solidFill>
+                <a:highlight>
+                  <a:srgbClr val="FFFFFF"/>
+                </a:highlight>
+              </a:rPr>
+              <a:t>)</a:t>
+            </a:r>
+            <a:r>
+              <a:rPr lang="nl-NL" sz="2800" b="0" dirty="0">
+                <a:solidFill>
+                  <a:srgbClr val="000000"/>
+                </a:solidFill>
+                <a:highlight>
+                  <a:srgbClr val="FFFFFF"/>
+                </a:highlight>
+              </a:rPr>
+              <a:t> </a:t>
+            </a:r>
+            <a:r>
+              <a:rPr lang="nl-NL" sz="2800" b="1" dirty="0">
+                <a:solidFill>
+                  <a:srgbClr val="000080"/>
+                </a:solidFill>
+                <a:highlight>
+                  <a:srgbClr val="FFFFFF"/>
+                </a:highlight>
+              </a:rPr>
+              <a:t>{</a:t>
+            </a:r>
+            <a:endParaRPr lang="nl-NL" sz="2800" b="0" dirty="0">
+              <a:solidFill>
+                <a:srgbClr val="000000"/>
+              </a:solidFill>
+              <a:highlight>
+                <a:srgbClr val="FFFFFF"/>
+              </a:highlight>
+            </a:endParaRPr>
+          </a:p>
+          <a:p>
+            <a:pPr marL="0" indent="0">
+              <a:buNone/>
+            </a:pPr>
+            <a:r>
+              <a:rPr lang="en-US" sz="2800" b="0" dirty="0">
+                <a:solidFill>
+                  <a:srgbClr val="000000"/>
+                </a:solidFill>
+                <a:highlight>
+                  <a:srgbClr val="FFFFFF"/>
+                </a:highlight>
+              </a:rPr>
+              <a:t>    </a:t>
+            </a:r>
+            <a:r>
+              <a:rPr lang="en-US" sz="2800" b="0" dirty="0" err="1">
+                <a:solidFill>
+                  <a:srgbClr val="000000"/>
+                </a:solidFill>
+                <a:highlight>
+                  <a:srgbClr val="FFFFFF"/>
+                </a:highlight>
+              </a:rPr>
+              <a:t>cout</a:t>
+            </a:r>
+            <a:r>
+              <a:rPr lang="en-US" sz="2800" b="0" dirty="0">
+                <a:solidFill>
+                  <a:srgbClr val="000000"/>
+                </a:solidFill>
+                <a:highlight>
+                  <a:srgbClr val="FFFFFF"/>
+                </a:highlight>
+              </a:rPr>
+              <a:t> </a:t>
+            </a:r>
+            <a:r>
+              <a:rPr lang="en-US" sz="2800" b="1" dirty="0">
+                <a:solidFill>
+                  <a:srgbClr val="000080"/>
+                </a:solidFill>
+                <a:highlight>
+                  <a:srgbClr val="FFFFFF"/>
+                </a:highlight>
+              </a:rPr>
+              <a:t>&lt;&lt;</a:t>
+            </a:r>
+            <a:r>
+              <a:rPr lang="en-US" sz="2800" b="0" dirty="0">
+                <a:solidFill>
+                  <a:srgbClr val="000000"/>
+                </a:solidFill>
+                <a:highlight>
+                  <a:srgbClr val="FFFFFF"/>
+                </a:highlight>
+              </a:rPr>
+              <a:t> name </a:t>
+            </a:r>
+            <a:r>
+              <a:rPr lang="en-US" sz="2800" b="1" dirty="0">
+                <a:solidFill>
+                  <a:srgbClr val="000080"/>
+                </a:solidFill>
+                <a:highlight>
+                  <a:srgbClr val="FFFFFF"/>
+                </a:highlight>
+              </a:rPr>
+              <a:t>&lt;&lt;</a:t>
+            </a:r>
+            <a:r>
+              <a:rPr lang="en-US" sz="2800" b="0" dirty="0">
+                <a:solidFill>
+                  <a:srgbClr val="000000"/>
+                </a:solidFill>
+                <a:highlight>
+                  <a:srgbClr val="FFFFFF"/>
+                </a:highlight>
+              </a:rPr>
+              <a:t> </a:t>
+            </a:r>
+            <a:r>
+              <a:rPr lang="en-US" sz="2800" b="0" dirty="0">
+                <a:solidFill>
+                  <a:srgbClr val="808080"/>
+                </a:solidFill>
+                <a:highlight>
+                  <a:srgbClr val="FFFFFF"/>
+                </a:highlight>
+              </a:rPr>
+              <a:t>" scored "</a:t>
+            </a:r>
+            <a:r>
+              <a:rPr lang="en-US" sz="2800" b="0" dirty="0">
+                <a:solidFill>
+                  <a:srgbClr val="000000"/>
+                </a:solidFill>
+                <a:highlight>
+                  <a:srgbClr val="FFFFFF"/>
+                </a:highlight>
+              </a:rPr>
+              <a:t> </a:t>
+            </a:r>
+            <a:r>
+              <a:rPr lang="en-US" sz="2800" b="1" dirty="0">
+                <a:solidFill>
+                  <a:srgbClr val="000080"/>
+                </a:solidFill>
+                <a:highlight>
+                  <a:srgbClr val="FFFFFF"/>
+                </a:highlight>
+              </a:rPr>
+              <a:t>&lt;&lt;</a:t>
+            </a:r>
+            <a:r>
+              <a:rPr lang="en-US" sz="2800" b="0" dirty="0">
+                <a:solidFill>
+                  <a:srgbClr val="000000"/>
+                </a:solidFill>
+                <a:highlight>
+                  <a:srgbClr val="FFFFFF"/>
+                </a:highlight>
+              </a:rPr>
+              <a:t> grade </a:t>
+            </a:r>
+            <a:r>
+              <a:rPr lang="en-US" sz="2800" b="1" dirty="0">
+                <a:solidFill>
+                  <a:srgbClr val="000080"/>
+                </a:solidFill>
+                <a:highlight>
+                  <a:srgbClr val="FFFFFF"/>
+                </a:highlight>
+              </a:rPr>
+              <a:t>&lt;&lt;</a:t>
+            </a:r>
+            <a:r>
+              <a:rPr lang="en-US" sz="2800" b="0" dirty="0">
+                <a:solidFill>
+                  <a:srgbClr val="000000"/>
+                </a:solidFill>
+                <a:highlight>
+                  <a:srgbClr val="FFFFFF"/>
+                </a:highlight>
+              </a:rPr>
+              <a:t> </a:t>
+            </a:r>
+            <a:r>
+              <a:rPr lang="en-US" sz="2800" b="0" dirty="0" err="1">
+                <a:solidFill>
+                  <a:srgbClr val="000000"/>
+                </a:solidFill>
+                <a:highlight>
+                  <a:srgbClr val="FFFFFF"/>
+                </a:highlight>
+              </a:rPr>
+              <a:t>endl</a:t>
+            </a:r>
+            <a:r>
+              <a:rPr lang="en-US" sz="2800" b="1" dirty="0">
+                <a:solidFill>
+                  <a:srgbClr val="000080"/>
+                </a:solidFill>
+                <a:highlight>
+                  <a:srgbClr val="FFFFFF"/>
+                </a:highlight>
+              </a:rPr>
+              <a:t>;</a:t>
+            </a:r>
+            <a:endParaRPr lang="en-US" sz="2800" b="0" dirty="0">
+              <a:solidFill>
+                <a:srgbClr val="000000"/>
+              </a:solidFill>
+              <a:highlight>
+                <a:srgbClr val="FFFFFF"/>
+              </a:highlight>
+            </a:endParaRPr>
+          </a:p>
+          <a:p>
+            <a:pPr marL="0" indent="0">
+              <a:buNone/>
+            </a:pPr>
+            <a:r>
+              <a:rPr lang="en-NL" sz="2800" b="1" dirty="0">
+                <a:solidFill>
+                  <a:srgbClr val="000080"/>
+                </a:solidFill>
+                <a:highlight>
+                  <a:srgbClr val="FFFFFF"/>
+                </a:highlight>
+              </a:rPr>
+              <a:t>}</a:t>
+            </a:r>
+            <a:endParaRPr lang="en-NL" sz="2800" b="0" dirty="0">
+              <a:solidFill>
+                <a:srgbClr val="000000"/>
+              </a:solidFill>
+              <a:highlight>
+                <a:srgbClr val="FFFFFF"/>
+              </a:highlight>
+            </a:endParaRPr>
+          </a:p>
+          <a:p>
+            <a:pPr marL="0" indent="0">
+              <a:buNone/>
+            </a:pPr>
+            <a:r>
+              <a:rPr lang="nl-NL" sz="2800" b="0" dirty="0">
+                <a:solidFill>
+                  <a:srgbClr val="000000"/>
+                </a:solidFill>
+                <a:highlight>
+                  <a:srgbClr val="FFFFFF"/>
+                </a:highlight>
+              </a:rPr>
+              <a:t>file</a:t>
+            </a:r>
+            <a:r>
+              <a:rPr lang="nl-NL" sz="2800" b="1" dirty="0">
+                <a:solidFill>
+                  <a:srgbClr val="000080"/>
+                </a:solidFill>
+                <a:highlight>
+                  <a:srgbClr val="FFFFFF"/>
+                </a:highlight>
+              </a:rPr>
+              <a:t>.</a:t>
+            </a:r>
+            <a:r>
+              <a:rPr lang="nl-NL" sz="2800" b="0" dirty="0">
+                <a:solidFill>
+                  <a:srgbClr val="000000"/>
+                </a:solidFill>
+                <a:highlight>
+                  <a:srgbClr val="FFFFFF"/>
+                </a:highlight>
+              </a:rPr>
+              <a:t>close</a:t>
+            </a:r>
+            <a:r>
+              <a:rPr lang="nl-NL" sz="2800" b="1" dirty="0">
+                <a:solidFill>
+                  <a:srgbClr val="000080"/>
+                </a:solidFill>
+                <a:highlight>
+                  <a:srgbClr val="FFFFFF"/>
+                </a:highlight>
+              </a:rPr>
+              <a:t>();</a:t>
+            </a:r>
+            <a:endParaRPr lang="en-US" b="1" dirty="0">
+              <a:solidFill>
+                <a:srgbClr val="000080"/>
+              </a:solidFill>
+              <a:highlight>
+                <a:srgbClr val="FFFFFF"/>
+              </a:highlight>
+            </a:endParaRPr>
+          </a:p>
+        </p:txBody>
+      </p:sp>
+      <p:pic>
+        <p:nvPicPr>
+          <p:cNvPr id="3" name="Picture 2">
+            <a:extLst>
+              <a:ext uri="{FF2B5EF4-FFF2-40B4-BE49-F238E27FC236}">
+                <a16:creationId xmlns:a16="http://schemas.microsoft.com/office/drawing/2014/main" id="{18B657FC-56F4-D4A2-6EB4-FED1C5660403}"/>
+              </a:ext>
+            </a:extLst>
+          </p:cNvPr>
+          <p:cNvPicPr>
+            <a:picLocks noChangeAspect="1"/>
+          </p:cNvPicPr>
+          <p:nvPr/>
+        </p:nvPicPr>
+        <p:blipFill>
+          <a:blip r:embed="rId2"/>
+          <a:stretch>
+            <a:fillRect/>
+          </a:stretch>
+        </p:blipFill>
+        <p:spPr>
+          <a:xfrm>
+            <a:off x="8618191" y="0"/>
+            <a:ext cx="3573809" cy="2440649"/>
+          </a:xfrm>
+          <a:prstGeom prst="rect">
+            <a:avLst/>
+          </a:prstGeom>
+        </p:spPr>
+      </p:pic>
+    </p:spTree>
+    <p:extLst>
+      <p:ext uri="{BB962C8B-B14F-4D97-AF65-F5344CB8AC3E}">
+        <p14:creationId xmlns:p14="http://schemas.microsoft.com/office/powerpoint/2010/main" val="1772249638"/>
+      </p:ext>
+    </p:extLst>
+  </p:cSld>
+  <p:clrMapOvr>
+    <a:masterClrMapping/>
+  </p:clrMapOvr>
+</p:sld>
+</file>
+
+<file path=ppt/slides/slide14.xml><?xml version="1.0" encoding="utf-8"?>
+<p:sld xmlns:a="http://schemas.openxmlformats.org/drawingml/2006/main" xmlns:r="http://schemas.openxmlformats.org/officeDocument/2006/relationships" xmlns:p="http://schemas.openxmlformats.org/presentationml/2006/main">
+  <p:cSld>
+    <p:spTree>
+      <p:nvGrpSpPr>
         <p:cNvPr id="1" name=""/>
         <p:cNvGrpSpPr/>
         <p:nvPr/>
@@ -4252,7 +6435,7 @@
 </p:sld>
 </file>
 
-<file path=ppt/slides/slide12.xml><?xml version="1.0" encoding="utf-8"?>
+<file path=ppt/slides/slide15.xml><?xml version="1.0" encoding="utf-8"?>
 <p:sld xmlns:a="http://schemas.openxmlformats.org/drawingml/2006/main" xmlns:r="http://schemas.openxmlformats.org/officeDocument/2006/relationships" xmlns:p="http://schemas.openxmlformats.org/presentationml/2006/main">
   <p:cSld>
     <p:spTree>
@@ -4820,7 +7003,7 @@
 </p:sld>
 </file>
 
-<file path=ppt/slides/slide13.xml><?xml version="1.0" encoding="utf-8"?>
+<file path=ppt/slides/slide16.xml><?xml version="1.0" encoding="utf-8"?>
 <p:sld xmlns:a="http://schemas.openxmlformats.org/drawingml/2006/main" xmlns:r="http://schemas.openxmlformats.org/officeDocument/2006/relationships" xmlns:p="http://schemas.openxmlformats.org/presentationml/2006/main">
   <p:cSld>
     <p:spTree>
@@ -5502,7 +7685,7 @@
 </p:sld>
 </file>
 
-<file path=ppt/slides/slide14.xml><?xml version="1.0" encoding="utf-8"?>
+<file path=ppt/slides/slide17.xml><?xml version="1.0" encoding="utf-8"?>
 <p:sld xmlns:a="http://schemas.openxmlformats.org/drawingml/2006/main" xmlns:r="http://schemas.openxmlformats.org/officeDocument/2006/relationships" xmlns:p="http://schemas.openxmlformats.org/presentationml/2006/main">
   <p:cSld>
     <p:spTree>
@@ -5979,7 +8162,7 @@
 </p:sld>
 </file>
 
-<file path=ppt/slides/slide15.xml><?xml version="1.0" encoding="utf-8"?>
+<file path=ppt/slides/slide18.xml><?xml version="1.0" encoding="utf-8"?>
 <p:sld xmlns:a="http://schemas.openxmlformats.org/drawingml/2006/main" xmlns:r="http://schemas.openxmlformats.org/officeDocument/2006/relationships" xmlns:p="http://schemas.openxmlformats.org/presentationml/2006/main">
   <p:cSld>
     <p:spTree>
@@ -6827,7 +9010,7 @@
 </p:sld>
 </file>
 
-<file path=ppt/slides/slide16.xml><?xml version="1.0" encoding="utf-8"?>
+<file path=ppt/slides/slide19.xml><?xml version="1.0" encoding="utf-8"?>
 <p:sld xmlns:a="http://schemas.openxmlformats.org/drawingml/2006/main" xmlns:r="http://schemas.openxmlformats.org/officeDocument/2006/relationships" xmlns:p="http://schemas.openxmlformats.org/presentationml/2006/main">
   <p:cSld>
     <p:spTree>
